--- a/decks/hist-tudors/hist-tudors_ch2_henry-split.pptx
+++ b/decks/hist-tudors/hist-tudors_ch2_henry-split.pptx
@@ -126,30 +126,30 @@
   <p:extLst>
     <p:ext uri="{521415D9-36F7-43E2-AB2F-B90AF26B5E84}">
       <p14:sectionLst xmlns:p14="http://schemas.microsoft.com/office/powerpoint/2010/main">
-        <p14:section name="Opening" id="{c68d4260-6cbd-5beb-55ed-732217e1652a}">
+        <p14:section name="Opening" id="{fd321a69-087c-dcce-204a-7ab56ddf40d9}">
           <p14:sldIdLst>
             <p14:sldId id="256"/>
           </p14:sldIdLst>
         </p14:section>
-        <p14:section name="Gate" id="{bed953d5-f334-b91d-8447-06c6e81992a8}">
+        <p14:section name="Gate" id="{16ab5e62-a857-76e5-66c0-28b9f2933e4d}">
           <p14:sldIdLst>
             <p14:sldId id="257"/>
             <p14:sldId id="258"/>
           </p14:sldIdLst>
         </p14:section>
-        <p14:section name="Pre-teach" id="{37c2ca0b-8fe7-abac-6544-25c541ea5e50}">
+        <p14:section name="Pre-teach" id="{58969947-08ff-d08d-4492-2a17870b059c}">
           <p14:sldIdLst>
             <p14:sldId id="259"/>
             <p14:sldId id="260"/>
           </p14:sldIdLst>
         </p14:section>
-        <p14:section name="Read-along" id="{1ffb6be6-4525-a4c0-f80a-060edbfd8fb9}">
+        <p14:section name="Read-along" id="{cd39fd5b-25cf-e4f0-ed65-f38eb913e171}">
           <p14:sldIdLst>
             <p14:sldId id="261"/>
             <p14:sldId id="262"/>
           </p14:sldIdLst>
         </p14:section>
-        <p14:section name="Teach" id="{3a4bdf3a-9008-09bc-97bb-b66045b834d5}">
+        <p14:section name="Teach" id="{aab1c3b8-b79e-784a-853a-e52ceb91a7c5}">
           <p14:sldIdLst>
             <p14:sldId id="263"/>
             <p14:sldId id="264"/>
@@ -157,7 +157,7 @@
             <p14:sldId id="266"/>
           </p14:sldIdLst>
         </p14:section>
-        <p14:section name="Routes" id="{a36ea44b-7f82-63f4-37ec-293cb887d31d}">
+        <p14:section name="Routes" id="{8e6c340a-ae58-c5bd-572e-708afb5ccf1a}">
           <p14:sldIdLst>
             <p14:sldId id="267"/>
             <p14:sldId id="268"/>
@@ -166,12 +166,12 @@
             <p14:sldId id="271"/>
           </p14:sldIdLst>
         </p14:section>
-        <p14:section name="Close" id="{05197909-dee1-98eb-00d4-7f36d7061cab}">
+        <p14:section name="Close" id="{a83a908d-65c1-71df-9a3a-2dcf05589be5}">
           <p14:sldIdLst>
             <p14:sldId id="272"/>
           </p14:sldIdLst>
         </p14:section>
-        <p14:section name="Answers" id="{9c621802-b26f-2057-652f-6f8260240315}">
+        <p14:section name="Answers" id="{ea20aa3b-de6c-00db-405c-4237e3a94477}">
           <p14:sldIdLst>
             <p14:sldId id="273"/>
             <p14:sldId id="274"/>
@@ -674,7 +674,7 @@
             <a:r>
               <a:rPr lang="en-US" dirty="0"/>
               <a:t>Teach — Three problems: marriage, money and power. Say it in your own words, then check understanding with a quick question: ask a pupil from the pre-teach group first, since they met these words and ideas before the lesson. Pupils try to recall before you re-explain.
-Your lesson's worksheet sorts Henry's reasons into three problems, each with the law or action that solved it. Marriage: the Pope would not annul Henry's marriage. In January 1533 Henry married Anne Boleyn anyway, and the Act in Restraint of Appeals, 1533, took the power to decide religious matters in England away from the Pope, so Henry's own bishops could end the marriage to Catherine.
+Your lesson's worksheet sorts Henry's reasons into three problems, each with the law or action that solved it. Marriage: the Pope would not annul Henry's marriage. In January 1533 Henry married Anne Boleyn anyway, and the Act in Restraint of Appeals, 1533, meant that religious cases in England were no longer the Pope's to judge, so Henry's own bishops could end the marriage to Catherine.
 Money: the Church was enormously rich. Your lesson says it owned about 25 per cent of the land in England, and Protestants criticised its wealth. Henry began closing the monasteries from 1536, taking their land and treasure for the Crown; this is the Dissolution of the Monasteries. In 1538 he destroyed the shrine of St Thomas Becket at Canterbury and took its gold and jewels.
 Power: in 1534 the Act of Supremacy made Henry Supreme Head of the Church of England, so the Pope had no authority in England at all. The Treasons Act of the same year made it treason, punishable by death, to deny the king's new title. Some historians argue that power, not love or religion, was Henry's real reason for the split.
 Worked example — model it step by step, thinking aloud: Explain how the problem of money helped cause Henry's split from the Catholic Church. (1) Point: One reason Henry split from the Catholic Church was money. (2) Evidence: The Church owned about 25 per cent of the land in England, and Henry, a lavish spender who loved war, was short of money. (3) Explain: Once Henry was head of the Church he could close the monasteries and take their land and treasure, which he began to do from 1536. (4) Link: Therefore money was a reason for the split, because breaking with the Pope let Henry take the Church's wealth for himself. Answer: Point, evidence, explain, link: the Church's wealth (about 25 per cent of the land) became Henry's once he was head of the Church, through the Dissolution of the Monasteries from 1536..
@@ -2352,7 +2352,7 @@
             <a:r>
               <a:rPr lang="en-US" dirty="0"/>
               <a:t>Teach — Three problems: marriage, money and power. Say it in your own words, then check understanding with a quick question: ask a pupil from the pre-teach group first, since they met these words and ideas before the lesson. Pupils try to recall before you re-explain.
-Your lesson's worksheet sorts Henry's reasons into three problems, each with the law or action that solved it. Marriage: the Pope would not annul Henry's marriage. In January 1533 Henry married Anne Boleyn anyway, and the Act in Restraint of Appeals, 1533, took the power to decide religious matters in England away from the Pope, so Henry's own bishops could end the marriage to Catherine.
+Your lesson's worksheet sorts Henry's reasons into three problems, each with the law or action that solved it. Marriage: the Pope would not annul Henry's marriage. In January 1533 Henry married Anne Boleyn anyway, and the Act in Restraint of Appeals, 1533, meant that religious cases in England were no longer the Pope's to judge, so Henry's own bishops could end the marriage to Catherine.
 Money: the Church was enormously rich. Your lesson says it owned about 25 per cent of the land in England, and Protestants criticised its wealth. Henry began closing the monasteries from 1536, taking their land and treasure for the Crown; this is the Dissolution of the Monasteries. In 1538 he destroyed the shrine of St Thomas Becket at Canterbury and took its gold and jewels.
 Power: in 1534 the Act of Supremacy made Henry Supreme Head of the Church of England, so the Pope had no authority in England at all. The Treasons Act of the same year made it treason, punishable by death, to deny the king's new title. Some historians argue that power, not love or religion, was Henry's real reason for the split.
 Worked example — model it step by step, thinking aloud: Explain how the problem of money helped cause Henry's split from the Catholic Church. (1) Point: One reason Henry split from the Catholic Church was money. (2) Evidence: The Church owned about 25 per cent of the land in England, and Henry, a lavish spender who loved war, was short of money. (3) Explain: Once Henry was head of the Church he could close the monasteries and take their land and treasure, which he began to do from 1536. (4) Link: Therefore money was a reason for the split, because breaking with the Pope let Henry take the Church's wealth for himself. Answer: Point, evidence, explain, link: the Church's wealth (about 25 per cent of the land) became Henry's once he was head of the Church, through the Dissolution of the Monasteries from 1536..
